--- a/Redis_Vector_Database_Presentation  -  Repaired.pptx
+++ b/Redis_Vector_Database_Presentation  -  Repaired.pptx
@@ -144,7 +144,7 @@
     </p:spTree>
     <p:extLst>
       <p:ext uri="{BB962C8B-B14F-4D97-AF65-F5344CB8AC3E}">
-        <p14:creationId xmlns:p14="http://schemas.microsoft.com/office/powerpoint/2010/main" val="2352897991"/>
+        <p14:creationId xmlns:p14="http://schemas.microsoft.com/office/powerpoint/2010/main" val="3242402715"/>
       </p:ext>
     </p:extLst>
   </p:cSld>
@@ -291,6 +291,7 @@
             <a:r>
               <a:rPr lang="en-US" dirty="0"/>
               <a:t>■ שקופית 1 מתוך 8 — שקופית פתיחה.
+♦ הקשר חשוב: אתה מנהל תשתית מציג חומר חדש לעמיתים שלא מכירים Vector DBs, RAG או Embeddings. זה Knowledge transfer, לא מכירה. הקהל לא סובל מ-Latency, הם לא בנו עדיין RAG. אתה מנגיש נוף טכנולוגי חדש.
 ★ מה אתה רואה כרגע על המסך:
 רקע כהה בצבע נייבי עמוק (Big Stone, ‎#163341‎ — צבע המותג הרשמי של Redis לרקעים כהים).
 פס דק בגוון אדום-כתום (Red Orange, ‎#FF4438‎) חוצה את החלק העליון של השקופית.
@@ -307,10 +308,18 @@
 • Caching — זיכרון מטמון.
 • Session state — מצב סשן (השיחה הנוכחית של המשתמש).
 • Sub-millisecond — תת-מילישניה (פחות מ-1ms לתגובה).
-★ מה לומר (פתיחה, 60-90 שניות):
-"בוקר טוב לכולם, ותודה שבאתם. במהלך 25 הדקות הבאות נצלול יחד לתוך אחת השאלות האדריכליות הכי חשובות של 2026: איך נכון לבנות שכבת נתונים לאפליקציות AI בקנה מידה תפעולי. בעידן של LLMs, RAG וסוכנים אוטונומיים, רבים מהארגונים מצאו את עצמם עם 'גן חיות' של מערכות נפרדות — Database רלציוני, Cache, ו-Vector Database עצמאי — שכל אחת מהן דורשת ניהול נפרד, מוסיפה latency ומכפילה עלויות.
-המצגת תראה איך Redis, שכבר רץ ברוב הארגונים בישראל ובעולם בתפקידי Cache ו-Session, התפתח לפלטפורמת נתונים בזמן אמת שיכולה להחליף את כל ה-stack הזה. זו לא הצהרה שיווקית — זו תוצאה של שינוי אדריכלי דרמטי שקרה ב-Redis 8: מנגנון המודולים פורק, ו-Vector Sets ו-JSON הוטמעו ב-Native לתוך ליבת המנוע.
-המסר המרכזי שאני רוצה שתיקחו הביתה: כשהוקטור והמטא-דאטה והסשן יושבים באותו מרחב In-Memory, Latency של בקשת RAG יורד מ-300ms ל-3ms, עלויות תשתית יורדות בעשרות אחוזים, ומורכבות הקוד מצטמצמת משמעותית."
+★ מה לומר (פתיחה, 60-90 שניות) — גרסה למנגיש ידע:
+"בוקר טוב. במצגת הזו אני רוצה לעדכן אתכם על שינוי משמעותי שהתרחש ב-Redis בשנה האחרונה — שינוי שאני חושב שכדאי שכולנו נכיר, גם אם בארגון שלנו עדיין לא בנינו פרויקט שדורש את היכולת הזו.
+Redis, שאנחנו מכירים בעיקר כ-Cache או כתור הודעות, התפתח להיות גם פלטפורמה לאחסון וחיפוש של מה שנקרא 'Vector Embeddings' — והמושג הזה הוא הדבר הראשון שאסביר. ככל שאפליקציות בינה-מלאכותית הופכות לחלק מהמוצרים שלנו, היכולת הזו תהפוך לדרישה תשתיתית, ואני רוצה שניכנס לזה מוכנים.
+עוד 30 דקות נצא מפה כשכולם מבינים: מה זה Vector Database, מה השתנה ב-Redis 8, ומה המשמעות לבחירות תשתיתיות שנעשה בעתיד. אני לא מציע פרויקט מיגרציה — אני מציע שנכיר את הכלי שכבר נמצא ב-Stack שלנו ומה הוא יכול לעשות."
+★ מסלול הסשן:
+שקופית 2 — איך נראה Stack של AI מודרני, ולמה Redis רלוונטי שם.
+שקופית 3 — מה השתנה במנוע של Redis 8.
+שקופית 4 — איך עובד חיפוש וקטורי (FLAT, HNSW, SVS-VAMANA).
+שקופית 5 — Hybrid Search ואלגוריתם RRF.
+שקופית 6 — RedisVL, Semantic Cache, Agentic Memory.
+שקופית 7 — סקלאביליות, TCO ומיצוב מול אלטרנטיבות.
+שקופית 8 — סיכום.
 ★ מסלול הסשן (לציין בקצרה):
 שקופית 2 — הבעיה האדריכלית של ה-Vector DB העצמאי.
 שקופית 3 — מה השתנה ב-Redis 8 (87%‎- Latency, 144%+ QPS).
@@ -424,29 +433,26 @@
 • ANN index — Approximate Nearest Neighbor index (אינדקס לחיפוש שכנים קרובים בקירוב — אלגוריתם שמאפשר למצוא וקטורים דומים מבלי להשוות מול כולם).
 • Latency tax — "מס זמן-תגובה" (כל קפיצת רשת מוסיפה זמן ולכן מטילה "מס" על המערכת).
 • Sync drift — דריפט סנכרון (כשנתון מתעדכן באחד המערכות אבל לא בשנייה).
+★ הקשר נדרש לפני שמתחילים את השקף:
+שלושה מושגים שצריך להציג ב-90 שניות לפני שאתה אומר משהו על השקף, כי הקהל לא מכיר:
+1. Embedding (הטמעה) — להסביר ככה: "מודלים כמו ChatGPT הם רשתות נוירונים. אחת היכולות שלהם היא לקחת משפט בעברית — נגיד 'איך מאפסים סיסמה' — ולהפוך אותו לרשימה של 1,536 מספרים. שני משפטים בעלי משמעות דומה יקבלו רשימות-מספרים דומות מתמטית. המספרים האלה הם 'Embedding'. כל אפליקציית AI מודרנית מבוססת על היכולת הזו."
+2. Vector Database (בסיס נתונים וקטורי) — "סוג חדש של בסיס נתונים שמתמחה באחסון מיליונים מהרשימות-מספרים האלה ובחיפוש 'מי הכי דומה למה'. זה מה שמאפשר חיפוש סמנטי וצ'אטבוטים שזוכרים."
+3. RAG (Retrieval-Augmented Generation) — "ארכיטקטורה שבה לפני שאנחנו שואלים את ChatGPT שאלה, אנחנו קודם מחפשים בבסיס הידע הפנימי שלנו את המסמכים הרלוונטיים, ומוסיפים אותם לשאלה. ככה ChatGPT עונה על המידע שלנו, לא רק על מידע פומבי שלמד."
 ★ הסיפור שצריך לספר (3-4 דקות דיבור):
-תעשיית התוכנה עוברת כעת שינוי אדריכלי דרמטי. אני קורא לזה "המעבר מאפליקציות חסרות-מצב לאפליקציות מבוססות-זיכרון". בשלב הראשון של מהפכת ה-LLM (2022-2023) רוב הארגונים בנו אפליקציות פשוטות: שלחנו prompt ל-API של OpenAI, קיבלנו תשובה, סיימנו. בשלב הזה Redis היה עוזר נחמד לקאשינג של תשובות.
-ב-2024-2026 כל זה השתנה. כיום אנחנו בונים:
-• מערכות RAG (Retrieval-Augmented Generation — יצירה-מועצמת-שליפה) — שבהן ה-LLM צריך לקבל הקשר מבסיס ידע פרטי לפני שהוא עונה.
-• AI Agents (סוכני AI אוטונומיים) — שצריכים זיכרון, יכולת תכנון, ושליפה הקשרית.
-• Conversational systems (מערכות שיחתיות) — שצריכות לזכור את כל ההיסטוריה של המשתמש.
-כדי לפתור את צד החיפוש הסמנטי, ארגונים מיהרו לאמץ Vector Databases עצמאיים — Pinecone, Weaviate, Milvus, Qdrant. כל אחד מהם הוא מוצר מצוין בפני עצמו. אבל פה נכנסת המלכודת האדריכלית: עכשיו במקום מערכת אחת יש לנו שלוש או ארבע.
-תארו לעצמכם בקשת RAG אופיינית של משתמש:
-1. הבקשה מגיעה לאפליקציה.
-2. האפליקציה ניגשת ל-In-Memory Cache לשלוף את ה-session ואת ההיסטוריה — זו קפיצת רשת ראשונה (כ-1-3ms).
-3. האפליקציה שולחת את ה-prompt ל-Vector DB לחיפוש סמנטי — קפיצה שנייה (5-10ms ב-SaaS חיצוני).
-4. ה-Vector DB מחזיר IDs של מסמכים, האפליקציה ניגשת ל-PostgreSQL לשלוף את הטקסט המלא — קפיצה שלישית (3-5ms).
-5. הכל עובר ל-LLM, שמחזיר תשובה — שוב קפיצה (200-1000ms).
-סך הכל לפני שהמשתמש בכלל ראה תווית מהתשובה — עברו 300-500ms סתם על תיאום בין מערכות.
-מעבר לבעיית ה-Latency, יש לנו:
-• בעיית סנכרון — כשמשתמש מעלה מסמך חדש, צריך לעדכן את ה-RDBMS, לחשב embedding ולעדכן את ה-Vector DB, ולפסול cache. כל בעיה באחד הצעדים יוצרת חוסר עקביות.
-• בעיית עלות — אנחנו משלמים על RAM (יקר מאוד) ב-3 מקומות.
-• בעיית אבטחה — צריך לתחזק ACLs ב-3 מערכות, ולוודא שהן עקביות.
-הפתרון שתמצאו ב-Redis 8: כל זה יושב באותו תהליך, באותו מרחב כתובות, באותם 64GB של RAM. אין קפיצה. כשהבקשה מגיעה — היא נפתרת ב-millisecond אחד או פחות.
-★ דוגמה קונקרטית לדבר עליה (אופציונלי):
-"אצל לקוח אנטרפרייז ישראלי שעבדתי איתו לאחרונה, הם הריצו צ'אטבוט תמיכה על stack עם Pinecone + Postgres + ElastiCache. p99 latency של תשובה היה 1.2 שניות. אחרי מעבר ל-Redis 8 unified, ה-p99 ירד ל-180ms. הקוד התקצר בכמעט 40% (כי שכבת התיאום בין המערכות נמחקה). עלות התשתית ירדה ב-55%."
-★ נקודות לשאלות מהקהל שצפויות:
-שאלה: "אבל Pinecone הוא SaaS מנוהל, אני חוסך ops!" — תשובה: זה נכון אם אתה לא משתמש ב-Redis בכלל. אם הוא רץ בארגון, ההוספה של Vector Search היא הפעלת flag ולא מוצר חדש לתחזוקה.</a:t>
+"אחרי שהבנו מה זה Embedding, Vector DB ו-RAG, השאלה הבאה היא: איך מרכיבים מערכת כזו? אם תפתחו Medium או Stack Overflow ותחפשו 'how to build RAG', תקבלו תמיד את הארכיטקטורה שמופיעה בצד שמאל של השקף. שלוש מערכות נפרדות:
+1. בסיס נתונים רלציוני (כמו Postgres, MySQL, או Oracle) — שמחזיק את הנתונים הקלאסיים: משתמשים, מסמכים, הרשאות.
+2. מטמון בזיכרון (לרוב Redis עצמו!) — שמחזיק את הסשנים הפעילים של המשתמשים, היסטוריית שיחה, JWT tokens.
+3. Vector Database ייעודי (Pinecone, Weaviate, Milvus, Qdrant) — שמחזיק את ה-Embeddings של המסמכים והשאלות.
+זו הגישה הנאיבית. היא עובדת. כל הצעדים שלכם בלימוד הראשוני יובילו אתכם לשם. אבל יש לה כמה מאפיינים שכדאי שנכיר לפני שנבחר אותה:
+• בכל בקשת משתמש, האפליקציה מבצעת קריאה לכל אחת מהמערכות בנפרד. כל קריאה כזו עוברת ברשת — וזה מה שמסומן בשקף כ-'network hop'. בכל קפיצה כזו אנחנו 'משלמים' 1-5 מילישניות. בבקשת RAG מלאה יש 3-4 קפיצות. סך הכל ‎10-20ms‎ סתם על תיאום, לפני שבכלל הגענו ל-LLM.
+• כשהמסמכים מתעדכנים, צריך לסנכרן בין המערכות. אם מסמך חדש נכנס ל-Postgres, מישהו צריך לדאוג להעביר את ה-Embedding שלו ל-Pinecone. כל פיגור או כשל בתהליך הזה יוצר חוסר עקביות שאף אחד לא רואה — Pinecone יחזיר את הגרסה הישנה ולא תהיה הודעת שגיאה. בייצור זה כואב.
+• תפעולית — שלוש מערכות = שלושה ACLs, שלוש מערכות backup, שלושה אדמיניסטרטורים שצריך לקרוא בלילה.
+הצד הימני של השקף מציג את האפשרות החדשה — לאחד את שלושת התפקידים במנוע אחד. במקום שלוש מערכות נפרדות, יש Redis 8 שמחזיק את שלוש שכבות הנתונים באותו תהליך, באותו זיכרון פנימי. למה זה אפשרי עכשיו, ולא היה אפשרי לפני שנה? את זה נראה בשקופית הבאה.
+חשוב להבהיר: אני לא אומר שכולם צריכים לוותר על Postgres או Pinecone. אני אומר שכשנגיע לבנות פרויקט AI ראשון בארגון, זו אופציה ראויה לבחינה — במיוחד כי Redis ממילא יש בארגון."
+★ מה הקהל שלי כנראה ישאל:
+1. "האם זה אומר שאנחנו מחליפים את Postgres ב-Redis?" — תשובה: לא. Postgres נשאר ל-OLTP הקלאסי. Redis 8 מחליף את הצורך להוסיף מערכת נוספת (Pinecone) רק עבור Vector Search.
+2. "אם רוב הבלוגים מציגים את הארכיטקטורה השמאלית — היא לא 'הסטנדרט'?" — תשובה: היא הייתה הסטנדרט עד 2024. ב-2025-2026 Redis (וגם Postgres עם pgvector) הצליחו להשיג ביצועים שמתחרים ב-Pinecone, וזה משנה את הבחירה.
+3. "כמה Latency חוסכים בפועל?" — תשובה: באפליקציית RAG טיפוסית, 30-100ms p99. לא הבדל אסטרונומי, אבל משמעותי לתחושת 'שיחה' של המשתמש.</a:t>
             </a:r>
           </a:p>
         </p:txBody>
@@ -561,19 +567,20 @@
 • Query amplification — הגברת שאילתות (פעולה אחת של משתמש הופכת לאלפי שאילתות פנימיות במערכת).
 • ACL (Access Control List) — רשימת בקרת גישה: מנגנון הרשאות לפי משתמש/תפקיד.
 • Replication — רפליקציה / שכפול: העתקה אוטומטית של נתונים לשרתים נוספים לגיבוי וזמינות גבוהה.
+★ הקשר נדרש: הקהל שלך מכיר את Redis כ-Cache. מה הוא לא יודע — שיש מאחורי הקלעים מנגנון "Modules" (תוספים), ושב-2024-2025 Redis עברה שינוי אדריכלי גדול. תזכיר זאת לפני שאתה מסביר את המספרים.
 ★ הסיפור (3-4 דקות):
-"כדי להבין למה Redis 8 הוא נקודת מפנה, צריך להכיר את ההיסטוריה. מאז Redis 4 (2017) חברת Redis בנתה מודל של Modules — היכולת להעמיס תוספים בריצה, כמו RediSearch, RedisJSON, RedisTimeSeries. זה היה גמיש להפליא, אבל היה לו מחיר ביצועי: כל שאילתה לוקטור הייתה צריכה לחצות גבול בין מנוע הליבה למודול ההרחבה — ובכל חצייה כזו יש קונטקסט-סוויץ' שעולה מילישניות.
-ביוני 2024 פורסם Redis 8 GA, ובאוגוסט 2025 Redis 8.2. החברה לקחה את הצעד הדרסטי וביטלה את מנגנון המודולים. כל מה שהיה מודול בעבר — Search, JSON, Time-Series, Probabilistic data structures, ובעיקר מבנה הנתונים החדש Vector Sets — נכלל עכשיו בקוד הליבה. אם תורידו את Redis 8 הקלאסי בלי שום תוסף, יש לכם מיד את כל היכולות.
-התוצאה הביצועית מדהימה — ובחנתי את המספרים האלה במו עיניי במעבדה:
-• ‎−87%‎ ב-Latency של פקודות. כלומר אם פקודת FT.SEARCH לקחה 2ms ב-Redis 7 + RediSearch, היא לוקחת ‎0.26ms‎ ב-Redis 8.
-• ‎+144%‎ ב-QPS כשמשתמשים ב-Vector Quantization (שיטה שדוחסת את הוקטורים לדיוק נמוך יותר וחוסכת זיכרון). כלומר אם השרת שלך החזיק 5,000 QPS, עכשיו הוא יחזיק 12,200.
-• 160,000 הוספות וקטור בשנייה על Node בודד. זה אומר שאפשר להזרים 10 מיליון מסמכים ב-60 שניות בלבד.
-• מנוע I/O רב-Threaded חדש לחלוטין: ה-Main Thread של Redis היה תמיד single-threaded (בכוונה — כדי להבטיח עקביות), אבל פעולות I/O (קריאה/כתיבה לרשת) ו-replication עברו ל-thread pool. במבחנים, Redis 8 הצליח לבצע sync מלא של dataset של 10GB תוך כדי טיפול ב-26.84 מיליון עדכונים — בלי לעצור את העיבוד הראשי.
-אבל היתרון הכי חשוב הוא לא הביצועים אלא הארכיטקטורה: Co-location. נסביר. בארכיטקטורה הקלאסית של Pinecone, אתה שומר וקטורים שם ומטא-דאטה במקום אחר. כל שאילתה הופכת ל-2-3 בקשות נפרדות. זה נקרא Query Amplification, ובמערכות microservices מודרניות בקשת משתמש אחת יכולה להפוך ל-1000 קריאות פנימיות.
-ב-Redis 8, אתה שומר את הוקטור באותו Hash או JSON document שמכיל גם את המטא-דאטה (שם המסמך, מחבר, תאריך יצירה, רמת הרשאה, תגיות). שאילתה היברידית בודדת בודקת בו-זמנית: 'תן לי את 10 הוקטורים הכי דומים, אבל רק כאלה שתאריך יצירתם &gt; 2024 ושהמשתמש הנוכחי מורשה לראות'. כל זה — בקריאה אחת, ב-In-Memory, ב-1ms.
-הוסיפו לזה ACLs מורחבים — Redis 8 מאפשר עכשיו להגדיר הרשאות ברמת prefix של מפתחות, ולהפריד בין צוותים, מחלקות ופרויקטים, ויש לכם פלטפורמת ארגונית מלאה."
-★ נקודה לשאלה צפויה:
-שאלה: "מה עם backwards compatibility? ארגונים שכבר משתמשים ב-RediSearch כמודול?" — תשובה: Redis 8 שומר על תאימות ה-API לחלוטין. הקוד הקיים (FT.CREATE, FT.SEARCH וכו') עובד בלי שינויים, פשוט רץ על מנוע מהיר יותר. ה-Migration מ-Redis 7+RediSearch ל-Redis 8 הוא עדכון גרסה, לא שכתוב.</a:t>
+"כדי להבין למה השינוי הזה רלוונטי לנו, צריך רגע להכיר את ההיסטוריה של Redis עצמה. רובנו מכירים את Redis כ-Cache פשוט: SET key value, GET key, ובחזרה. אבל מאחורי הקלעים, מאז 2017, חברת Redis פיתחה מנגנון בשם 'Modules' — תוספי הרחבה שאפשר להעמיס בזמן ריצה. כך נולדו RediSearch (לחיפוש טקסט), RedisJSON (לאחסון JSON), RedisTimeSeries (לסדרות-זמן). זה היה גמיש מאוד, אבל היה לזה מחיר ביצועי: כל שאילתה צריכה הייתה לחצות גבול בין הליבה למודול, ובכל חצייה יש 'context switch' שעולה מילישניות.
+ביוני 2024 יצא Redis 8, ובאוגוסט 2025 גרסה 8.2. החברה החליטה צעד דרסטי: לבטל את מנגנון המודולים. כל היכולות שהיו מודול — חיפוש, JSON, Time-Series, ובעיקר מבנה נתונים חדש בשם Vector Sets — מוטמעות עכשיו בליבה עצמה. כשמורידים Redis 8 בסיסי, מקבלים את הכול בלי תוספים.
+המספרים שאתם רואים על השקף הם של הבדיקות הרשמיות של Redis (מקור: blog.redis.io). אסביר אותם:
+• ‎−87% Latency‎ — כלומר אם פקודה ב-Redis 7 לקחה 2 מילישניות, ב-Redis 8 היא לוקחת ‎0.26‎. זה ההבדל בין 'ניתן לחוש' ל'בלתי מורגש'.
+• ‎+144% QPS‎ — QPS זה Queries Per Second, שאילתות לשנייה. כלומר אותו שרת מטפל ביותר מפי שניים שאילתות. זה רלוונטי אם פעם נצטרך להריץ הרבה חיפושי וקטור במקביל.
+• 160,000 הוספות וקטור בשנייה על שרת יחיד. זה אומר שגם אם נחליט להזרים 10 מיליון מסמכים — זה לוקח דקה.
+• מנוע I/O רב-חוטי (Multithreaded). תזכרו ש-Redis תמיד עבד על thread יחיד — זה הסוד שלו לעקביות. ב-Redis 8, רק הליבה עדיין על thread יחיד, אבל פעולות הקריאה/כתיבה ברשת והרפליקציה עברו לכמה threads. מה זה אומר תפעולית? שניתן לסנכרן 10GB מ-Master ל-Replica תוך כדי טיפול במיליוני עדכונים — בלי לעצור את הפעילות.
+שני הקלפים בתחתית מסכמים שני שינויים אדריכליים נוספים שכדאי להכיר:
+• הקלף השמאלי — 'מודולים פורקו לליבה'. זה בעיקר רלוונטי כשאני אומר לכם שאם בעתיד נשדרג Redis לגרסה 8, אנחנו פשוט מקבלים את כל היכולות החדשות. אין צורך להתקין מודולים נפרדים, להגדיר licenses נוספים, או לדאוג להתאמה בין גרסאות.
+• הקלף הימני — 'Co-location, not query amplification'. זה מושג חשוב. במערכת רגילה (Pinecone + Postgres) הוקטור יושב במקום אחד והמטא-דאטה במקום אחר. שאילתה אחת של משתמש מתפצלת לשתיים-שלוש שאילתות פנימיות — וזה מה שנקרא 'Query Amplification' (הגברת שאילתות). ב-Redis 8 הוקטור והמטא-דאטה יושבים באותו Hash או JSON. שאילתה אחת מחזירה את שניהם. זה גם מהיר יותר וגם פשוט יותר מבחינת קוד.
+הסיכום מבחינתנו כצוות תשתית: אם נחליט לשדרג ל-Redis 8 אצלנו (וזה דבר שנעשה בכל מקרה), נקבל את היכולות האלה ב'חינם'. לא צריך לרכוש מוצר חדש."
+★ שאלה צפויה: "האם השדרוג מ-Redis 6/7 ל-Redis 8 שובר תאימות?" — תשובה: לא. כל ה-API נשמר. אם רץ אצלכם RediSearch כמודול, הוא יפעל אחרי השדרוג בלי שינוי קוד.</a:t>
             </a:r>
           </a:p>
         </p:txBody>
@@ -693,25 +700,25 @@
 • Billion-scale — בסקלה של מיליארדים.
 • Memory ceiling — תקרת זיכרון: הגבול של כמה RAM זמין על השרת.
 • TCO — Total Cost of Ownership / עלות בעלות כוללת: כל העלויות (שרתים, רישוי, תחזוקה, חשמל) על פני זמן.
-★ הסיפור (4-5 דקות):
-"בואו נצלול לפנימיות. אחרי שבחרתם להשתמש ב-Redis כפלטפורמה, צריך לקבל שתי החלטות אדריכליות: באיזה מדד מרחק להשתמש, ובאיזה אלגוריתם אינדוקס לבחור.
-התחילו עם מדד המרחק. זה החלק הכי קריטי וגם הכי חשוף לטעויות. כל מודל הטמעה (Embedding Model) מאומן עם מדד מסוים בראש. למשל, text-embedding-ada-002 ו-text-embedding-3 של OpenAI מאומנים עם Cosine Similarity. אם תיצור אינדקס עם L2 ותחבר את המודל הזה — תקבל תוצאות שגויות סמנטית, אבל ללא error. שום דבר לא יקרוס. פשוט החיפוש יחזיר וקטורים שלא רלוונטיים. זה נקרא 'כשל שקט' (Silent Failure) והוא הכי מסוכן.
-חשוב: ב-Redis הבחירה היא Immutable. אחרי FT.CREATE עם מדד מסוים — לא ניתן לשנות. הדרך היחידה היא למחוק את האינדקס וליצור מחדש. תכננו טוב מראש.
-המלצה מעשית: אם המודל שלכם הוא OpenAI, sentence-transformers, או רוב מודלי ה-LLM-embedding — Cosine. אם זה מודל Computer Vision (כמו ResNet) — לרוב L2. אם המודל מנרמל כבר — Inner Product (מהיר יותר ב-CPU).
-עכשיו לאלגוריתם:
-1. FLAT — האלגוריתם הפשוט. הוא לא 'מחפש' באמת. הוא מחשב מרחק מהשאילתה לכל וקטור באינדקס, ממיין, ומחזיר את ה-k הקרובים. כן — בכוח גס. דיוק 100%, אבל זמן O(n). על מיליון וקטורים זה כמה שניות. השתמשו ב-FLAT רק כש: יש פחות מ-50K וקטורים, אתם בסביבת בדיקות, או יש דרישה רגולטורית שאסור לפספס אפילו וקטור אחד (תחומים רפואיים מסוימים, מערכות משפטיות).
-2. HNSW — Hierarchical Navigable Small World. זה הסטנדרט של 2022-2024 ל-Production. הרעיון: בונים גרף בכמה שכבות. השכבה העליונה דלילה — אולי 100 צמתים שמייצגים את כל המאגר. השכבה התחתונה צפופה — מכילה את כל מיליון הוקטורים. החיפוש מתחיל בשכבה עליונה, מתקדם לעבר אזור ה-target ב-greedy routing, ויורד שכבה כשמגיעים ל-local minimum. תוצאה: O(log n), recall של 95-99%, וזמני תגובה של 1-2ms על מיליון וקטורים. החיסרון העיקרי: צריכת RAM. עבור מיליון וקטורים של 768 ממדים, הגרף לבדו יכול לתפוס 2-4GB. הפרמטרים M, EF_CONSTRUCTION, EF_RUNTIME מאזנים בין recall, מהירות, ושימוש בזיכרון.
-3. SVS-VAMANA — החידוש של Redis 8.2 (אוגוסט 2025) בשיתוף עם Intel. בנוי על עקרונות DiskANN של Microsoft Research. במקום הירארכיה של שכבות, הוא בונה גרף שטוח חד-שכבתי, אבל מובנה בצורה שהמרחק הממוצע בין כל שני צמתים בגרף קצר (Small World property). יותר חשוב — הוא מובנה משולב עם Locally-Adaptive Vector Quantization (LVQ): טכניקה שמדחיסה את הוקטורים מ-32-bit floats ל-8-bit ints, אבל הדחיסה אדפטיבית — אזורים בעלי גוון צפוף יותר נדחסים יותר. החיסכון בזיכרון: 26-37%, ובאזור יישומי 40-60%. הירידה ב-recall: זניחה (חצי אחוז עד אחוז אחד). זה האלגוריתם של מיליארדי הוקטורים.
-המלצת בחירה:
-• פחות מ-50K וקטורים → FLAT.
-• 50K עד 50M וקטורים, RAM זול → HNSW.
-• מעל 50M וקטורים, או כש-TCO הוא הקריטריון העיקרי → SVS-VAMANA.
-★ פרטים שכדאי להזכיר אם יש זמן:
-• הקצאת זיכרון של HNSW מחושבת לפי הנוסחה: ‎(d × 4 + M × 2 × 4) × N‎ בייטים. עבור 1M וקטורים, d=768, M=32: כ-3GB.
-• מעבר מ-HNSW ל-SVS-VAMANA לא אוטומטי — דורש re-indexing. Redis מספקים נוטבוק מעבר ב-GitHub: redis-ai-resources/python-recipes/vector-search/06_hnsw_to_svs_vamana_migration.ipynb.
-• אפשר ליצור אינדקסים מרובים על אותו מאגר נתונים — אינדקס FLAT לקיבוץ קטן + אינדקס HNSW למאגר הראשי, וכך לקבל את שניהם.
-★ שאלה צפויה:
-"איך אני בוחר את k (מספר התוצאות) הנכון?" — תשובה: ב-RAG טיפוסי, k=5 עד k=20 הוא בית הספר. תלוי ב-token budget של ה-LLM. תמיד לבדוק עם eval-set אמיתי של השאלות הצפויות.</a:t>
+★ הקשר נדרש לפני השקף — שאלה חשובה לקהל:
+"כששואלים את עצמכם איך מערכת מוצאת 'את הוקטור הכי דומה' בתוך מיליון וקטורים — מה התשובה?". התשובה הטריוויאלית היא 'תשווה לכל אחד', אבל זה לא ריאלי. השקף הזה מסביר איך עושים את זה במציאות.
+★ הסיפור (4-5 דקות) — בגרסה למנגיש ידע:
+"אם יום אחד נחליט להריץ Vector Database אצלנו, יהיו לנו שתי החלטות טכניות לקבל מראש. השקף הזה מציג אותן.
+ההחלטה הראשונה — בשורה העליונה — היא 'מדד המרחק' (Distance Metric). זה התשובה לשאלה המתמטית: 'איך מודדים כמה שני וקטורים דומים זה לזה?'. יש שלוש אפשרויות סטנדרטיות:
+• Cosine Similarity (דמיון קוסינוס) — מודד את הזווית בין שני וקטורים. זו הברירת מחדל לרוב מודלי השפה כמו OpenAI, ולכן רוב המקרים שלנו ייפלו פה.
+• L2 או Euclidean — המרחק 'הישיר' במרחב. שימושי בעיקר לתמונות ולא לטקסט.
+• Inner Product (מכפלה פנימית) — אופטימיזציה של Cosine למקרים מסוימים.
+מה חשוב לדעת? **הבחירה היא בלתי-הפיכה אחרי יצירת האינדקס.** אם נטעה ונבחר L2 כשמודל ה-Embedding מצפה ל-Cosine, נקבל תוצאות מוזרות בלי הודעת שגיאה — מה שנקרא 'כשל שקט'. זו נקודה שצריך לשים לב אליה כשמתכננים. ההמלצה הפרקטית: בשביל מודלי OpenAI/Anthropic — תמיד Cosine.
+ההחלטה השנייה — בשורה התחתונה — היא 'אלגוריתם האינדקס'. כלומר: איך מבנה הנתונים מאחסן וקטורים כדי שאפשר יהיה לחפש בהם מהר. ל-Redis יש שלוש אופציות, וכל אחת היא compromise אחר בין דיוק, מהירות וזיכרון.
+האפשרות הראשונה היא FLAT. האלגוריתם הפשוט ביותר — בעצם הוא 'לא מחפש' באמת. כשמשתמש שואל שאלה, FLAT משווה את הוקטור של השאלה מול כל וקטור במאגר אחד-אחד, ממיין לפי מרחק, ומחזיר את הקרובים ביותר. דיוק מושלם — 100%. אבל הזמן הוא O(n), כלומר לינארי — מיליון וקטורים = מיליון השוואות = שניות. FLAT מתאים רק למאגרים קטנים מאוד (פחות מ-50,000 וקטורים), לסביבת בדיקות, או למקרים שבהם אסור לפספס אף תוצאה.
+האפשרות השנייה היא HNSW — ראשי תיבות של Hierarchical Navigable Small World. זה הסטנדרט של התעשייה היום, ומה ש-Pinecone, Weaviate וכל המתחרים משתמשים בו. הרעיון יפהפה: במקום להחזיק את כל הוקטורים ברשימה שטוחה, בונים גרף בכמה שכבות. השכבה העליונה דלילה — אולי 100 וקטורים מייצגים. השכבה התחתונה צפופה — כל המיליון. כשמחפשים, מתחילים מלמעלה ויורדים שכבה-שכבה לעבר ה-target. זה כמו לחפש כתובת — אתה לא בודק כל בית בעיר, אתה מתחיל ברובע, מתקרב לרחוב, ואז מחפש את המספר. תוצאה: O(log n), מאוד מהיר. החיסרון? הגרף הזה צורך הרבה זיכרון. עבור מיליון וקטורים של 768 ממדים, צריך 2-4GB רק לאינדקס, מעבר לוקטורים עצמם.
+האפשרות השלישית והחדשה ביותר היא SVS-VAMANA. זו אופציה שנוספה ל-Redis בגרסה 8.2 (אוגוסט 2025), ופותחה בשיתוף Intel. הרעיון: גם גרף, אבל בלי שכבות — שכבה אחת שטוחה. בנוסף, האלגוריתם 'דוחס' את הוקטורים — הופך אותם ממספרים מדויקים (32 ביט) למספרים פחות מדויקים (8 ביט). מה זה אומר? חיסכון של 26-37% בזיכרון, עם ירידה זניחה בדיוק. זו האפשרות שצריך לבחור כשהמאגר ענק (עשרות מיליונים) ועלות הזיכרון הופכת לקריטריון העיקרי.
+המסקנה למי שלא רוצה לזכור את כל הפרטים:
+• פרויקט קטן/POC → FLAT.
+• פרויקט ייצור רגיל → HNSW.
+• מאגר ענק או צמצום עלויות → SVS-VAMANA.
+החלק הטוב הוא ש-Redis תומך בכל השלושה ואפשר להחליף ביניהם, אבל בנקודה מסוימת תצטרכו לקבל החלטה מודעת."
+★ שאלה צפויה: "מי בוחר את האלגוריתם — המפתח או צוות התשתית?" — תשובה: זו החלטה משותפת. בחירה לא נכונה (HNSW על 100K וקטורים, או FLAT על 10M) משפיעה על עלות תשתית — אז כדאי שצוות תשתית יהיה מעורב.</a:t>
             </a:r>
           </a:p>
         </p:txBody>
@@ -830,27 +837,24 @@
 • Reciprocal Rank Fusion (RRF) — מיזוג דירוגים הדדי: שיטה למיזוג רשימות מדורגות שאינה תלויה בניקוד גולמי אלא רק במיקום.
 • Smoothing factor — קבוע החלקה: ערך k בנוסחה שמונע שמסמך אחד עם דירוג #1 ידחק את כל השאר.
 • Linear-fusion — מיזוג ליניארי: שיטה אחרת בה הניקוד הסופי הוא ‎α·BM25 + β·Vector‎.
-★ הסיפור (4-5 דקות):
-"בואו נדבר על אחד הכשלים הכי מתסכלים של מערכות RAG בייצור. נגיד שבניתם מערכת לתמיכה טכנית, ומהנדס שואל: 'איך מתקנים שגיאת ORA-12541 במסד הנתונים?'. במאגר שלכם יש מסמך אחד שמתאר במדויק את השגיאה הזו, ועוד 1000 מסמכים על אורקל בכלל. חיפוש סמנטי טהור (וקטורי) עלול להחזיר מאמרים כלליים על אורקל ולפספס את המסמך הספציפי, כי המחרוזת 'ORA-12541' נמהלה בתוך embedding כללי של 1536 ממדים — היא איבדה את הייחודיות שלה.
-הבעיה הזו לא ייחודית למסדי נתונים. היא קורה עם:
-• קודי מוצר (SKU) שמופיעים פעם אחת בקטלוג.
-• שמות בעלות כמו 'Pinecone', 'GPT-4o', 'H100'.
-• מזהי תקלה ייחודיים, מספרי טיקטים, hash IDs.
-• ז'רגון פנימי בארגון שלא הופיע בנתוני האימון של מודל ה-Embedding.
-פתרון של Redis: Hybrid Search. במקום לבחור בין חיפוש מילולי ו-וקטורי, מריצים את שניהם במקביל ומאחדים תוצאות.
-איך זה עובד טכנית: פקודה אחת — FT.HYBRID — מבצעת בו-זמנית:
-1. חיפוש BM25 על שדות הטקסט. BM25 הוא אלגוריתם דירוג קלאסי שמבוסס על TF-IDF, ומצוין במונחים נדירים. הוא יחזיר את המסמך עם 'ORA-12541' בראש הרשימה.
-2. חיפוש וקטורי דרך HNSW או VAMANA על שדה ה-Embedding. הוא יחזיר את המסמכים הסמנטית-קרובים, כולל המסמך עם השגיאה (אם כי לא בהכרח במקום הראשון).
-עכשיו — איך מאחדים? כאן הסיפור מעניין. ניקוד BM25 הוא 'unbounded' — יכול להיות 5.2 או 47.8 או 532.1, הכל תלוי במאגר. ניקוד וקטור מנורמל ל-0 עד 1 (ב-Cosine Similarity). אם תחבר אותם נאיבית, BM25 ידחק את הוקטור לחלוטין — או להפך, תלוי בנתונים.
-פתרון אלגנטי שהפך לסטנדרט בתעשייה: RRF — Reciprocal Rank Fusion (אגב, זה האלגוריתם שגם Microsoft Azure Cognitive Search ו-Elasticsearch משתמשים בו, לא רק Redis).
-הנוסחה פשוטה: score(d) = Σ 1 / (k + rank_i(d)). תרגום: עבור כל מסמך, סוכמים על פני כל הרשימות (BM25 ו-Vector) את ‎1 / (60 + מיקום_המסמך_ברשימה)‎. ‎k=60‎ הוא קבוע ההחלקה הסטנדרטי. דוגמה: מסמך שמופיע במקום 1 ב-BM25 (1/61 = 0.0164) ובמקום 3 ב-Vector (1/63 = 0.0159), מקבל ניקוד מצרפי של 0.0323. מסמך שמופיע רק במקום 5 ב-Vector (1/65 = 0.0154) ולא ב-BM25 — מקבל פחות. זה מבטיח שמסמכים שמדורגים גבוה לפחות באחד החיפושים יזכו לתשומת לב.
-היופי בארכיטקטורה: כל זה קורה בתוך Redis. בלי קוד צד-אפליקציה. בלי לטעון רשימות גולמיות לזיכרון, לנרמל, לשלב. פקודה אחת, תוצאה אחת.
-לצוותים שצריכים שליטה עדינה יותר — Redis תומך גם ב-Linear Combination: ‎score = α · BM25_normalized + β · Vector_score‎ עם α ו-β שמכוונים לפי tuning. זה שימושי במקרים מאוד-מאוד-ספציפיים."
-★ דוגמה לקוד שלא מופיעה בשקופית אבל אפשר להזכיר:
-"ב-Python עם RedisVL, השאילתה ההיברידית כולה היא חמש שורות. אין pagination ידני, אין parsing של תוצאות, אין מיזוג ידני. הספרייה דואגת לכל."
-★ נקודה לתשומת לב:
-חיפוש היברידי הוא לא 'תמיד טוב יותר'. במקרים בהם השאלה תיאורית טהורה ('איך מסבירים סנכרון לילד בן 10?') — חיפוש וקטורי טהור יספיק. במקרים של תיעוד טכני — היברידי הוא חובה.
-★ שאלה צפויה: "איך ה-RRF מתמודד עם 5+ לקסיקלי + וקטורי + פילטר על מטא-דאטה?" — תשובה: RRF מטבעו תומך ב-N רשימות. אפשר להוסיף עוד מקורות אם צריך, ופילטרים על מטא-דאטה (תאריך, מחבר, הרשאה) קורים לפני המיזוג, לא חלק ממנו.</a:t>
+★ הקשר נדרש: לפני שאתה מסביר את השקף, תוודא שהקהל מבין את ההבחנה הבאה:
+"חיפוש וקטורי הוא חיפוש 'לפי משמעות'. כלומר 'תמצא לי מסמכים שדומים בכוונה לשאלה שלי'. אבל יש מצבים שבהם זה לא מספיק — צריך גם 'תמצא לי מסמכים שמכילים את המילה המדויקת הזו'. השקף הזה מדבר על המתח הזה."
+★ הסיפור (3-4 דקות):
+"חיפוש וקטורי, שראינו בשקפים הקודמים, הוא מהפכה. אבל הוא לא הפיתרון לכל דבר. הקופסה האדומה למעלה (Pain) מתארת מצב טיפוסי שבו חיפוש וקטורי טהור נכשל:
+דמיינו צ'אטבוט תמיכה. משתמש שואל 'איך מתקנים שגיאה ORA-12541?'. במאגר שלכם יש בדיוק מסמך אחד שמסביר את השגיאה הזו, ועוד 1,000 מסמכים שמדברים על Oracle באופן כללי. חיפוש וקטורי טהור עלול להחזיר מסמכים כלליים על Oracle ולפספס את המסמך הספציפי — כי המחרוזת 'ORA-12541' היא ייחודית מאוד, ובתוך וקטור של 1,536 ממדים היא 'נמהלה' עם המשמעות הכללית של המשפט.
+הבעיה הזו קיימת בכל מקום שיש מונחים ייחודיים: קודי מוצר (SKU), שמות מותגים, מזהי תקלות, שמות פנימיים בארגון שלא הופיעו בנתוני האימון של המודל.
+הפתרון הוא Hybrid Search — חיפוש היברידי. הרעיון: לא לבחור בין חיפוש מילולי וחיפוש וקטורי, אלא להריץ את שניהם במקביל ולמזג את התוצאות. זה בדיוק מה שמתאר הדיאגרמה במרכז השקף:
+• הקלף השמאלי בלבן (Sparse · BM25) הוא חיפוש 'מילולי' מסורתי. BM25 הוא אלגוריתם דירוג קלאסי שמשמש כל מנוע חיפוש בעולם — Elasticsearch, Lucene, Google. הוא מצוין במציאת מילים ספציפיות.
+• הקלף הימני בלבן (Dense · Vector ANN) הוא החיפוש הוקטורי שלמדנו בשקף הקודם — מבוסס HNSW או VAMANA.
+שני החיפושים רצים במקביל ומחזירים שתי רשימות מדורגות. ועכשיו השאלה האמיתית: איך ממזגים את התוצאות?
+זה לא טריוויאלי. ה-'ניקוד' של BM25 הוא חסר-גבול עליון — יכול להיות 5, או 50, או 500. הניקוד של חיפוש וקטורי מנורמל בין 0 ל-1. אם נחבר אותם נאיבית, אחד ידחק את השני.
+הפתרון הוא RRF — Reciprocal Rank Fusion (מיזוג דירוגים הדדי). זו הקופסה האדומה הגדולה במרכז. הנוסחה אלגנטית: לכל מסמך, מחשבים ‎1 / (60 + מיקום_ברשימה)‎ ומסכמים על פני שתי הרשימות. RRF מתעלם לחלוטין מהניקוד הגולמי — מה שחשוב זה רק המיקום היחסי של המסמך. מסמך שמופיע ב-#1 באחת הרשימות יקבל ציון גבוה גם אם בשנייה הוא במקום 5.
+היופי הוא ש-Redis עושה את כל זה דרך פקודה אחת — FT.HYBRID. אין צורך בקוד צד-אפליקציה שמטפל במיזוג. שלוש הקופסאות בתחתית מסכמות את שלושת היתרונות:
+• 'Single command' — הכול בפקודה אחת.
+• 'Bounded vs. unbounded scores' — RRF פותר את בעיית מיזוג הניקודים.
+• 'Linear-fusion fallback' — אם רוצים שליטה עדינה יותר, יש גם אפשרות עם משקלים α ו-β.
+מבחינתנו כצוות תשתית: זה אומר ש-Redis מטפל בנושאים שעד היום היינו צריכים לכתוב להם קוד אפליקטיבי או להשתמש ב-Elasticsearch בנפרד."
+★ שאלה צפויה: "אם BM25 כל כך טוב, למה לא רק להשתמש בו?" — תשובה: BM25 לא מבין משמעות. אם משתמש ישאל 'איך אני מאפס את הסיסמה' אבל המסמך כתוב 'שכחת סיסמה? לחץ כאן' — BM25 לא ימצא את זה כי המילים שונות. חיפוש וקטורי כן ימצא. שניהם משלימים זה את זה.</a:t>
             </a:r>
           </a:p>
         </p:txBody>
@@ -980,25 +984,18 @@
 • Stale context — הקשר ישן / לא רלוונטי.
 • Query redundancy — רדונדנטיות שאילתות: כמה שאלות חוזרות על עצמן (במחקר טיפוסי, 30-50% מהשאילתות הן דומות).
 • Offset the cost — מכסה את העלות.
+★ הקשר לפני השקף: עד עכשיו דיברנו על מה Redis יכול לעשות. השקף הזה מציג שלושה דברים שאם נחליט בעתיד לבנות אפליקציית AI אצלנו, אלו הכלים שיהיו לנו בהישג יד.
 ★ הסיפור (4-5 דקות):
-"מנוע חזק לבדו לא מספיק. אם פיתחת אי פעם RAG עם raw Redis Search commands, אתה יודע שזה מטריד — FT.CREATE עם 30 פרמטרים, encoding ידני של וקטורים, parsing של תוצאות. כדי שמפתחים יוכלו לבנות מהר, צריך שכבת abstraction חכמה. זו RedisVL.
-1. RedisVL — Redis Vector Library. ספריית Python בקוד פתוח שמטפלת בכל מחזור החיים של נתוני AI ב-Redis:
-   • Chunking — חלוקת מסמכים ארוכים למקטעים שמתאימים ל-embedding (אסטרטגיות מובנות: לפי פסקה, משפט, גודל טוקנים).
-   • Embedding — חיבור אוטומטי למודלי OpenAI, HuggingFace, Cohere, Vertex AI. אתם בוחרים מודל וזה זה.
-   • Index management — RedisVL בונה את הסכמה של האינדקס עבורכם, לפי declarative YAML או Python class, עם defaults חכמים.
-   • Query — מתחת למכסה רץ FT.SEARCH/FT.HYBRID, אבל ה-API נקי: ‎index.query(VectorQuery(vector=embedding, num_results=10, filters=...))‎.
-   • LangChain ו-LlamaIndex משתמשים ב-RedisVL מתחת. אם אתם כבר ב-LangChain — הצמדה ל-Redis זה שורת קוד אחת.
-2. Semantic Cache — לדעתי הפיצ'ר עם ה-ROI הכי גבוה ב-RedisVL. הבעיה: קריאות ל-LLM יקרות מאוד (GPT-4o ב-$5 ל-1M tokens, שכפול אצל לקוח אנטרפרייז יכול להגיע למאות דולרים ביום) ולא צפויות מבחינת latency (300ms-3sec). הפתרון הקלאסי הוא Caching, אבל מה לעשות עם שפה טבעית? התאמת מחרוזות לא עובדת — 'מה הבירה של צרפת?', 'מהי בירת צרפת?', 'תגיד לי את שם הבירה הצרפתית' — כולן אותה כוונה אבל מחרוזות שונות לחלוטין.
-Semantic Cache הופך כל prompt נכנס לוקטור (משתמש באותו מודל embedding שהאפליקציה כבר משתמשת בו), ומחפש prompts דומים סמנטית במטמון. הסף קונפיגורבילי — אם המרחק הקוסיני קטן מ-0.05 או 0.1 (תלוי בארגון), מחזירים את התשובה השמורה. אם לא — שולחים ל-LLM ושומרים את התשובה החדשה.
-מספרים מהשטח: בצ'אטבוט תמיכה טיפוסי, 40-70% מהשאילתות הן וריאציות של 50 שאלות נפוצות. Semantic Cache חוסך את כל הקריאות הללו. תגובה ב-1ms במקום 1500ms. בעלות תפעולית של מאות דולרים בחודש במקום אלפים.
-3. Agentic Memory — שכבת ה-Memory לסוכני AI. סוכן אוטונומי (כמו AutoGPT, או agents ב-LangGraph) צריך שני סוגי זיכרון:
-   • Working Memory (זיכרון עבודה) — מה קרה לפני 5 שניות? איזה כלי הסוכן זה עתה הריץ? מה הייתה התוצאה? זה עניין סדרתי, מהיר, קצר. ב-Redis: List או Stream של אירועי השיחה.
-   • Long-Term Memory (זיכרון לטווח ארוך) — מה ההעדפות של המשתמש? איזה פרויקטים הוא דיבר עליהם בעבר? ב-Redis: Vector Index שמכיל embeddings של אירועים מהעבר, נשלף לפי דמיון סמנטי.
-היופי: שני סוגי הזיכרון יושבים באותו Redis. אם אתה רץ על אינסטנס יחיד שמטפל ב-Cache, ב-Session, ב-Vector Search וב-Agent Memory — זה בדיוק המסר של 'unified data platform' שדיברנו עליו בשקופית 2.
-ויש פיצ'ר נוסף ב-RedisVL שכדאי להזכיר: SemanticRouter — מנתב prompts לסוכנים/microservices שונים לפי משמעות. נגיד שאתה בונה assistant עם 3 יכולות: code, data analysis, customer support. SemanticRouter מבין שאלה כמו 'אנא נתח את ה-CSV הזה' ושולח ל-data analysis pipeline ולא ל-code one. זה הופך multi-agent systems ל-trivial.
-★ ROI מהיר לדוגמה:
-"לקוח של Redis שראיתי דיווח רץ צ'אטבוט תמיכה עם 50K שאילתות ביום. בלי Semantic Cache: 50,000 × $0.03 (ממוצע GPT-4o) = $1,500/יום. עם cache hit rate של 60%: רק 20,000 קריאות = $600/יום. חיסכון של $900/יום, $27,000/חודש. עלות הקלאסטר של Redis: $400/חודש. ROI של חודש."
-★ שאלה צפויה: "איך אני בוחר את ה-threshold של Semantic Cache?" — תשובה: התחל עם 0.05 (cosine distance), הרץ A/B test על 1000 שאלות ידועות ובדוק שאחוז ה-false-positive (cache hit על שאלה שונה) פחות מ-1%. לארגונים מסוימים הסף האידיאלי 0.03, לאחרים 0.1.</a:t>
+"השקף הזה מציג שלוש יכולות שמגיעות 'בחבילה' עם Redis 8, וכל אחת מהן עונה על בעיה אחרת. נעבור על שלושתן.
+הראשונה (העמודה השמאלית באדום) היא RedisVL — ראשי תיבות של Redis Vector Library. זו ספריית Python שאינה חלק מ-Redis עצמו, אלא שכבת אבסטרקציה שמותקנת אצל המפתח. למה היא חשובה? כי כתיבת קוד מול Redis ל-Vector Search הוא לא טריוויאלי — צריך לפרמט וקטורים, להגדיר אינדקסים מורכבים, לטפל ב-encoding. RedisVL פותר את כל זה. במקום 50 שורות קוד, המפתח כותב 5. בנוסף, היא מתחברת אוטומטית למודלי Embedding (OpenAI, HuggingFace, Cohere) ולמסגרות פיתוח פופולריות (LangChain, LlamaIndex) שצוותי AI משתמשים בהן. מבחינתנו: כשמפתחים יבואו לבנות, יש להם API נקי לעבודה.
+השנייה (העמודה האמצעית בנייבי) היא Semantic Cache — מטמון סמנטי. זה הפיצ'ר שלדעתי הכי שווה להכיר. הבעיה שהוא פותר: קריאות ל-LLM (כמו ChatGPT) הן יקרות וגם איטיות. כל קריאה עולה כמה סנטים ולוקחת כמה שניות. עכשיו דמיינו צ'אטבוט תמיכה — 40-70% מהשאלות הן וריאציות של אותן 50 שאלות נפוצות. השאלות 'איך מאפסים סיסמה?' ו'איפה אני משנה את הסיסמה שלי?' הן בעצם אותה שאלה. מטמון מסורתי לא יזהה את זה — הוא משווה מחרוזות. Semantic Cache הופך את השאלה לוקטור ומחפש שאלות דומות סמנטית במטמון. אם נמצא — מחזיר מיד את התשובה ששמורה, חוסך קריאה ל-LLM. תגובה תוך 1 מילישנייה במקום 2 שניות. במקרים שראיתי, זה חוסך 60-70% מקריאות ה-LLM. זה לא רק חיסכון כספי — זה גם הבדל בחווית המשתמש.
+השלישית (העמודה הימנית באדום) היא Agentic Memory — זיכרון לסוכני AI. סוכן AI (Agent) הוא מערכת שלא רק עונה על שאלות אלא מבצעת משימות מורכבות. כדי לעשות את זה היא צריכה זיכרון. שני סוגי זיכרון, בעצם:
+• זיכרון לטווח קצר — מה קרה לפני 30 שניות? איזה כלי השתמשתי? מה הייתה התוצאה? זה זיכרון סדרתי, מהיר, קצר. ב-Redis זה List או Stream.
+• זיכרון לטווח ארוך — מה המשתמש סיפר עלי לפני שבוע? אלו העדפות הוא ציין? זה זיכרון סמנטי, נשלף לפי דמיון. ב-Redis זה Vector Index.
+היופי הוא ששני הזיכרונות יושבים באותו Redis instance. אין צורך לשלב מערכות נפרדות.
+הקופסה השחורה בתחתית מסכמת את הזווית הכלכלית: ברוב המערכות ייצור עם שאילתות חוזרות, החיסכון של Semantic Cache לבדו מכסה את עלות הקלאסטר של Redis. כלומר היכולת משלמת את עצמה.
+מה לקחת מהשקף: כשנגיע לבנות, אלו הכלים שאנחנו יכולים להציע לצוותי הפיתוח. לא צריך לבנות מאפס."
+★ שאלה צפויה: "האם RedisVL היא Open Source או Enterprise feature?" — תשובה: RedisVL היא Apache 2.0, פתוחה לחלוטין. עובדת על Redis Open Source ועל Redis Enterprise. אין מחיר.</a:t>
             </a:r>
           </a:p>
         </p:txBody>
@@ -1128,24 +1125,21 @@
 • VectorDBBench — מבחן השוואה תקני בתעשייה לבסיסי נתונים וקטוריים.
 • Recall ≥ 0.98 — דיוק שליפה ‎≥ 98%‎: סף איכות מקובל לבסיס נתונים מקצועי.
 • deep-image-96-angular / dbpedia-openai-1M-angular — שמות datasets סטנדרטיים. הראשון תמונות עם 96 ממדים, השני מאמרים מ-DBpedia מקודדים ב-OpenAI עם מטריקת Angular (כמו Cosine).
-★ הסיפור (4-5 דקות):
-"שקופית הכסף. כשארגון מחשיב מעבר ל-Vector Database, השאלה הראשונה של ה-CFO היא: 'כמה זה יעלה?'. נתחיל בקושי האמיתי — אחסון של מיליוני embeddings ב-RAM טהור. וקטור של 1536 ממדים תופס 6KB. מיליון וקטורים = 6GB. מאה מיליון = 600GB. לכל זה צריך להוסיף את ה-graph של HNSW (עד פי 1.5 מהוקטורים עצמם). על AWS, 100GB של RAM זה כ-$1500/חודש לפחות.
-Redis פותר את זה ב-3 דרכים:
-1. Redis Flex — היכולת המוטעת לשם. לשעבר נקראה Redis on Flash. זה מנוע אחסון רב-שכבתי בנוי על Speedb (fork מתקדם של RocksDB). הוא ממפה ב-real-time אילו keys 'חמים' (הכי מבוקשים) ואילו 'קרים' (לא נגעו בהם זמן רב). Hot keys נשארים ב-DRAM ל-Latency של ננו-שניות. Cold keys מוסטים ל-NVMe SSD. SSD מודרני (כמו AWS r6gd instances עם NVMe מובנה) משיג 100µs latency — הפרש של פי 1000 מ-RAM, אבל הפרש זניח עבור ה-95% מהמערכת. אדמיניסטרטור מגדיר יחס RAM:Flash. יחס טיפוסי לעומס AI: 30:70. תוצאה: עלות תשתית יורדת ב-50-90%. ב-Redis 8 הביצועים בתצורה הזו הם 10,000 ops/sec/core — כלומר על שרת 16-core מקבלים 160K ops/sec בעלות 30% בלבד מ-cluster RAM-only.
-2. Cluster Sharding — אם מאגר הנתונים גדול ממה ששרת יחיד יכול להחזיק (גם עם Flex), משתמשים ב-Redis Cluster. עד 1,000 צמתים, מחולקים בעזרת consistent hashing על key. הפעולות התקינות (SET/GET/HSET/VADD/VREM) — מתחלקות לינארית. אבל כאן יש מלכוד: שאילתת VSIM (חיפוש דמיון) דורשת ארכיטקטורה אחרת. למה? כי הוקטור הקרוב ביותר לשאילתה יכול להיות באיזשהו shard שאי אפשר לנחש מראש. הפתרון הוא scatter-gather: השאילתה נשלחת ל-N הצמתים, כל צומת מחזיר top-K מקומי, וה-proxy ממזג ובוחר את top-K גלובלי. זה מהיר מאוד אבל ה-Latency צובר זמן רשת — כל shard נוסף מוסיף קצת. לכן: לתכנן shards-count בקפידה. הגבלות בענן: AWS MemoryDB מאפשר Vector Search רק על shard יחיד, GCP Memorystore תומך ב-250 shards.
-3. Decision Matrix — מתי לבחור איזו טכנולוגיה?
-   • Redis 8.x — אם הארגון שלכם כבר משתמש ב-Redis ל-Cache או Session State (וזה כמעט תמיד נכון), הוספת Vector Search היא הפעלת flag. אין שכבת מערכת חדשה לתחזק. בנוסף, אם הדרישה היא p99 latency של פחות מ-10ms — Redis הוא הסטנדרט.
-   • Pinecone — אם אין Redis בארגון ואתם רוצים שירות SaaS שאף אחד לא יצטרך לתחזק — לגיטימי. עובד מצוין. הבעיה: עוד Stack.
-   • Milvus / Weaviate — אם יש מיליארדי וקטורים שצריכים GPU acceleration. אנחנו מדברים על Discord, OpenAI, או חברות AI עם eval datasets ענקיים. דרושה צוות פלטפורמה ייעודי.
-   • Postgres + pgvector — אם המערכת רלציונית בעיקרה ויש פחות מ-10M וקטורים. פשוט להוסיף, אבל לא מתאים לעומסים מאוד גבוהים.
-4. בנצ'מרקים — VectorDBBench הוא הסטנדרט בתעשייה. בדיקות אובייקטיביות מראות יתרון תפוקה של 21-62% ל-Redis 8 לעומת המתחרה הבא בתנאי Recall ≥ 0.98 — סף איכות שדורשים בייצור.
-המסקנה הכלכלית: Redis 8 + Flex + Semantic Cache לרוב משלם את עצמו תוך 60-90 ימים אצל ארגונים שמריצים workloads של AI."
-★ דוגמה מהשטח:
-"לקוח Redis שראיתי החליף 4 cluster-מוצרים נפרדים (Redis cache, ElasticSearch, Pinecone, Postgres) ב-Redis 8 cluster יחיד. הוצאת תשתית חודשית: ירדה מ-$48K ל-$11K. וזה לפני החיסכון מהפחתת קריאות ל-OpenAI."
-★ שאלות צפויות:
-1. "האם Redis Flex משפיע על Latency?" — כן, ב-cold reads נוסף 0.1-0.3ms. אבל hot path נשאר sub-ms. על כל אחוז cold, זה מוסיף ~0.5%. בייצור טיפוסי בלתי-נראה.
-2. "האם Cluster Sharding תומך ב-failover?" — כן. כל shard יכול להיות עם 1-3 replicas, ו-Sentinel/Cluster manager מטפל ב-failover אוטומטי בלי downtime.
-3. "האם Pinecone זול יותר ל-startups?" — לא בהכרח. Pinecone serverless מתחיל ב-$70/חודש אבל מכאן ועד 1M וקטורים זה כבר יקר. Redis Cloud Essentials מתחיל ב-$5/חודש ומתאים גם ל-vectors.</a:t>
+★ הקשר נדרש לפני השקף: "השקף הזה מתעסק בשלוש שאלות תשתיתיות שיעלו אם נחליט להריץ Vector DB אצלנו: כמה זיכרון נצטרך, איך נסקלר אם המאגר גדל, ומה החלופות שכדאי להשוות אליהן."
+★ הסיפור (4-5 דקות) — בגרסה למנגיש ידע:
+"השקף מחולק לארבעה רבעים, כל אחד נותן זווית אחרת על שיקולים תפעוליים שכדאי להכיר. לא צריך לקבל החלטה היום — אבל צריך לדעת מה השאלות.
+הרבע השמאלי-עליון (Redis Flex) מתעסק בעלות הזיכרון. הבעיה: וקטור טיפוסי של מודל OpenAI הוא 1,536 מספרים שתופסים 6KB. מיליון וקטורים = 6GB. מאה מיליון וקטורים = 600GB. לאחסן את זה ב-RAM זה יקר מאוד — RAM של 100GB ב-AWS עולה כ-1,500 דולר בחודש לכל הפחות. Redis Flex פותר את זה: שמירה אוטומטית של הוקטורים החמים (אלו שמחפשים אותם הרבה) ב-RAM, והסטה של הוקטורים הקרים ל-NVMe SSD — כונן SSD מהיר במיוחד. דומה במהותו ל-Swap של מערכת הפעלה, אבל חכם יותר. שלוש הברים שאתם רואים בקלף הם המחשה ויזואלית: וקטורים בשימוש (הבר הארוך) נשארים ב-RAM, וקטורים נדירים (הבר הקצר) יורדים ל-SSD. החיסכון בעלות יכול להגיע ל-90%, עם השפעה זניחה על Latency.
+הרבע הימני-עליון הוא Decision Matrix — איזה כלי לבחור מתי. ארבעה מועמדים, כל אחד מתאים לסיטואציה אחרת:
+• Redis 8.x — מתאים אם המערכת שלנו כבר משתמשת ב-Redis (וזה המצב אצלנו). להוסיף Vector Search זה לא להוסיף מערכת חדשה.
+• Pinecone — שירות SaaS מנוהל. מצוין למי שלא רוצה לתחזק כלום. החיסרון — עוד מערכת בנפרד.
+• Milvus / Weaviate — Open Source חזקים, אבל דורשים צוות תשתית ייעודי. רלוונטי לחברות עם מיליארדי וקטורים.
+• Postgres + pgvector — אם המערכת רלציונית בעיקרה ויש פחות מ-10 מיליון וקטורים, זה לעיתים הפשוט ביותר.
+מבחינתי כצוות תשתית, אין כאן 'הכי טוב' — יש התאמה לסיטואציה. השקף מספק לנו framework להחליט.
+הרבע השמאלי-תחתון מסביר נקודה חשובה לצוות תשתית: כשנעבור ל-Redis Cluster, הפעולות הרגילות (SET/GET) מתחלקות יפה בין שרתים. אבל חיפוש וקטורי דורש 'scatter-gather' — לשלוח את השאילתה לכל השרתים בו-זמנית, כי אי אפשר לדעת מראש על איזה שרת נמצא הוקטור הקרוב. זה אומר שתכנון מספר ה-shards חשוב — יותר מדי שרתים יוסיפו latency. נקודה חשובה: AWS MemoryDB עדיין מוגבל ל-shard יחיד עבור Vector Search. אם נשתמש בו — צריך לדעת.
+הרבע הימני-תחתון מציג בנצ'מרקים מ-VectorDBBench, הסטנדרט של התעשייה לבדיקת ביצועים של Vector DBs. תוצאות יחסיות ל-#2 בתעשייה. כלומר Redis 8 מהיר ב-62% ו-21% מהמתחרה הבא בשתי בדיקות סטנדרטיות, בתנאי Recall ≥ 0.98 — דרישת איכות שמקובלת בייצור.
+מה לקחת מהשקף: יש כלי לכל מצב. Redis 8 הוא בחירה לגיטימית במיוחד כשהוא כבר חלק מה-Stack שלנו, אבל הוא לא 'הפתרון היחיד'. כשנגיע להחליט — נתאים את הבחירה לדרישות הספציפיות."
+★ שאלה צפויה: "האם Redis Flex זה Enterprise-only?" — תשובה: כן, Flex היא יכולת של Redis Enterprise (Cloud או Self-managed). ב-Open Source זה לא קיים בצורה זו. הוסיף נקודה לבדיקה אם נחליט ללכת בכיוון.
+</a:t>
             </a:r>
           </a:p>
         </p:txBody>
@@ -1262,46 +1256,24 @@
 • Memory savings — חיסכון זיכרון.
 • Tiering — שכבות אחסון.
 • Q &amp; A — Questions &amp; Answers / שאלות ותשובות.
-★ הסיפור (סיכום ארוך, 5-7 דקות):
-"לסיכום, בואו נסכם את 25 הדקות האחרונות בארבעה מסרים שאני רוצה שתיקחו הביתה. אם תזכרו רק דבר אחד מהמצגת — אני מקווה שזה יהיה אחד מהארבעה האלה.
-מסר 1 — אחדו את ה-Stack. אם רק לפני שלוש שנים זה היה גימיק ארכיטקטוני, היום זו הצהרה בעלת כובד תפעולי. הסיבה הפשוטה: כל מערכת נוספת היא:
-   • עוד גבול אבטחה לתחזק.
-   • עוד מקור לבעיות סנכרון.
-   • עוד תור-המתנה ב-PagerDuty בשלוש בלילה.
-   • עוד שורה בחוזה האכיפה (audit) של ה-CISO.
-כשאתם בארגון מקבלים החלטה אדריכלית עבור פיצ'ר AI חדש, השאלה הראשונה לא צריכה להיות 'איזה Vector DB לבחור?' — אלא 'האם הוקטורים יכולים לשבת איפה שכבר יושב המידע התפעולי?'. אם התשובה כן (וברוב המקרים היא כן), הוסיפו ל-Redis. אל תוסיפו טכנולוגיה.
-מסר 2 — Redis 8 הוא מנוע שונה לחלוטין מ-Redis 7. ההזזה לליבה (Vector Sets, JSON, Search ב-Native), מנוע ה-I/O הרב-Threaded, ה-ACLs המורחבים, ו-SVS-VAMANA כאופציה — כל אלה הופכים את Redis ממטמון מצוין לפלטפורמת AI מצוינת. השיפורים אינם מינוריים: ‎−87% Latency, +144% QPS‎. זה פותח use cases חדשים — Real-time RAG עם תגובה תוך 50ms, Semantic Caching עם hit rate של 70%, Agent Memory עם זיכרון של מיליוני אינטראקציות.
-מסר 3 — בחרו את אלגוריתם ה-ANN הנכון. אל תקבלו את ברירות המחדל בעיניים עצומות. הקדישו זמן לבחירה:
-   • פחות מ-50K וקטורים → FLAT.
-   • 50K-50M, RAM זול → HNSW.
-   • 50M+ או TCO קריטי → SVS-VAMANA.
-ועוד יותר חשוב: הריצו A/B test על dataset אמיתי של הארגון שלכם. ה-recall שאתם מקבלים על MS-MARCO לא בהכרח שווה ל-recall שתקבלו על data של הלקוחות שלכם.
-מסר 4 — ה-TCO תמיד ינצח. אם יש לכם מתח בין הצוות הטכנולוגי שאוהב את 'הכלי הכי טוב לעבודה' (לרוב Pinecone או Milvus) לבין צוות הכספים שדואג לתקציב — בדקו שני דברים:
-   • Redis Flex על r6gd / r7gd instances עם NVMe מובנה: חוסך 50-90% בעלות זיכרון.
-   • Semantic Cache: חוסך 40-70% מקריאות ה-LLM. זה לרוב יותר ממה שעולה כל הקלאסטר.
-ההמלצה האופרטיבית שלי לסיום: זה לא טוב לחכות לרבעון הבא. חזרו מחר בבוקר ל-IDE שלכם, פתחו Jupyter Notebook, ועשו את הניסוי הבא:
-1. הקימו Redis 8 מקומי ב-Docker (פקודה אחת: ‎docker run -p 6379:6379 redis:8‎).
-2. הריצו את ה-tutorial של RedisVL — 30 דקות.
-3. קחו 100 שאילתות אמיתיות מה-LLM logs שלכם, הפעילו Semantic Cache עם threshold של 0.05, ומדדו את ה-cache hit rate.
-אם ה-hit rate יוצא 30% או יותר — יש לכם case business משכנע. אם הוא 50%+ — תזרזו את הפרויקט.
-תודה רבה לכל מי שהקשיב, אני מאוד מעריך את הזמן שלכם. אני שמח לענות על שאלות בנושא:
-• אדריכלות נתונים בעידן ה-AI.
-• בחירת מדדי מרחק ואלגוריתמים.
-• Migration מ-Vector DB עצמאי ל-Redis.
-• אסטרטגיית Sharding ו-HA.
-• כל היבט טכני אחר שהוצג."
-★ קישורים שכדאי לזכור (מופיעים גם על השקופית למטה):
-• docs.redisvl.com — תיעוד RedisVL.
-• redis.io/blog — בלוג רשמי עם use cases.
-• github.com/redis — קוד פתוח, נוטבוקים, דוגמאות.
-★ נקודה לפתיחת השאלות:
-"כדי לפתוח את החלק של השאלות, אשמח שמישהו ישתף — באיזה stack של AI אתם משתמשים היום, ואיפה המקום הראשון שאתם רואים שהאחדה אל Redis הייתה משחקת תפקיד?"
-★ תרחישי שאלות מורכבות שכדאי להיות מוכן אליהן:
-1. "האם Redis 8 רץ במצב Cluster Mode עם רפליקציה רב-אזורית?" — כן, באמצעות Active-Active Geo-Distributed (CRDB) ב-Redis Enterprise.
-2. "איך מתמודדים עם vector drift לאורך זמן?" — מודל ה-embedding מתעדכן מדי פעם, וצריך לעשות re-indexing. RedisVL מספק כלי automation לזה.
-3. "האם יש תמיכה ב-multi-tenant SaaS?" — כן, דרך key prefixes + ACL rules. כל שוכר מקבל prefix משלו.
-4. "האם Vector Sets תומכים ב-CPU-only או צריך GPU?" — CPU-only מספיק. GPU רלוונטי רק ל-embedding generation, לא ל-search.
-5. "האם Redis 8 רץ באוויר/closed environment?" — כן. הקוד פתוח, אפשר לרוץ on-prem או air-gapped.</a:t>
+★ הסיפור (סיכום, 4-5 דקות) — בגרסה למנגיש ידע:
+"בואו נסכם את 30 הדקות האחרונות בארבעה דברים שאני רוצה שתישארו איתם. אם תזכרו רק דבר אחד מהמצגת, אני מקווה שזה יהיה אחד מהארבעה האלה.
+מסר 1 — מושג ה'Stack המאוחד'. הכרנו היום את הרעיון שבמערכת AI מודרנית יש 3 שכבות נתונים: עסקיים, מטמון/סשן, וחיפוש סמנטי. ראינו שהגישה הקלאסית מפצלת אותן ל-3 מערכות, וזה יוצר עלויות נסתרות. כשנגיע לבנות בארגון, כדאי לזכור שיש אופציה לאחד את שלושתן ב-Redis אחד.
+מסר 2 — Redis 8 הוא לא ה-Redis שאנחנו זוכרים. אם בעבר Redis היה רק Cache, היום הוא פלטפורמת נתונים מלאה: Vector Search, JSON, Time-Series, ויותר. השדרוג ל-Redis 8 הוא משהו שאנחנו נעשה ממילא, וכשנעשה — נקבל את כל היכולות 'בחינם'.
+מסר 3 — אלגוריתמי חיפוש. הכרנו 3 אלגוריתמים: FLAT (פשוט, איטי), HNSW (סטנדרט הייצור), SVS-VAMANA (חוסך זיכרון). כשמפתחים יבואו לבקש מאיתנו להקים Vector DB — נדע לשאול אותם 'איזה אלגוריתם?' ולהבין את ההשלכות.
+מסר 4 — שיקולים תפעוליים. ראינו ש-Redis Flex מאפשר לחסוך עלויות זיכרון, שחיפוש ב-Cluster דורש תכנון מיוחד (scatter-gather), ושיש Decision Matrix להשוואה מול אלטרנטיבות. כל אלה נקודות שצריכות להיות לנו במודעות לפני שנקבל החלטה תשתיתית.
+המסקנה האופרטיבית שלי: אני לא מציע שנעשה משהו מחר בבוקר. אני מציע שתי פעולות מתונות:
+1. ברגע שמישהו בארגון יציע פרויקט שדורש 'Vector DB' או 'RAG' — שנוודא שב-Architecture Review השוואת Redis לאלטרנטיבות נכללת.
+2. כשנשדרג Redis בפעם הבאה — שנשדרג לגרסה 8, גם אם עדיין אין שימוש בוקטור. ככה כשהצורך יגיע, התשתית תהיה מוכנה.
+תודה לכולם על תשומת הלב. אני שמח לענות על שאלות."
+★ נקודה לפתיחת שאלות:
+"לפני שנעבור לשאלות, אשמח לדעת — אצל מי בארגון כאן מתחיל פרויקט שעלול לצטרך Vector Search או RAG? שווה שנדע מי המתעניינים."
+★ תרחישי שאלות צפויות:
+1. "מתי המעבר ל-Redis 8 צפוי אצלנו?" — תשובה הגונה: זה תלוי בלוחות הזמנים של צוות התשתית. כדאי לדבר על זה אחרי המצגת.
+2. "האם זה מחליף את ה-Cache הקיים שלנו?" — תשובה: לא — זה אותו Redis, רק עם יותר יכולות. הקאש הקיים ימשיך לעבוד בלי שינוי.
+3. "כמה זה יעלה לארגון?" — תשובה: בגלל שזה Open Source ב-Redis הקלאסי, רוב היכולות שראינו זמינות ללא תוספת מחיר. רק Redis Flex דורש Enterprise.
+4. "איך לומדים את זה?" — תשובה: docs.redisvl.com יש tutorial של חצי שעה. אני ממליץ לכל מי שמתעניין.
+5. "האם זה רלוונטי לפרויקטים non-AI?" — תשובה: בעיקר לא, אבל יכולות JSON ו-Search משופרות עוזרות גם שם.</a:t>
             </a:r>
           </a:p>
         </p:txBody>
